--- a/notes/arch-seq.pptx
+++ b/notes/arch-seq.pptx
@@ -5,7 +5,7 @@
     <p:sldMasterId id="2147483648" r:id="rId1"/>
   </p:sldMasterIdLst>
   <p:notesMasterIdLst>
-    <p:notesMasterId r:id="rId36"/>
+    <p:notesMasterId r:id="rId35"/>
   </p:notesMasterIdLst>
   <p:sldIdLst>
     <p:sldId id="281" r:id="rId2"/>
@@ -41,7 +41,6 @@
     <p:sldId id="286" r:id="rId32"/>
     <p:sldId id="280" r:id="rId33"/>
     <p:sldId id="302" r:id="rId34"/>
-    <p:sldId id="303" r:id="rId35"/>
   </p:sldIdLst>
   <p:sldSz cx="12192000" cy="6858000"/>
   <p:notesSz cx="6858000" cy="9144000"/>
@@ -146,14 +145,6 @@
     </p:ext>
   </p:extLst>
 </p:presentation>
-</file>
-
-<file path=ppt/revisionInfo.xml><?xml version="1.0" encoding="utf-8"?>
-<p1510:revInfo xmlns:a="http://schemas.openxmlformats.org/drawingml/2006/main" xmlns:r="http://schemas.openxmlformats.org/officeDocument/2006/relationships" xmlns:p1510="http://schemas.microsoft.com/office/powerpoint/2015/10/main">
-  <p1510:revLst>
-    <p1510:client id="{BBD7FA2B-FAA5-2845-BBE8-384CA589F73C}" v="16" dt="2022-11-22T14:22:13.519"/>
-  </p1510:revLst>
-</p1510:revInfo>
 </file>
 
 <file path=ppt/ink/ink1.xml><?xml version="1.0" encoding="utf-8"?>
@@ -432,7 +423,7 @@
           <a:p>
             <a:fld id="{C4325868-C8E9-8F48-A7A9-33704E029417}" type="datetimeFigureOut">
               <a:rPr lang="en-US" smtClean="0"/>
-              <a:t>11/29/22</a:t>
+              <a:t>4/15/26</a:t>
             </a:fld>
             <a:endParaRPr lang="en-US"/>
           </a:p>
@@ -1188,7 +1179,7 @@
           <a:p>
             <a:fld id="{48F3298D-9386-084D-8BF7-B185F903367F}" type="datetimeFigureOut">
               <a:rPr lang="en-US" smtClean="0"/>
-              <a:t>11/29/22</a:t>
+              <a:t>4/15/26</a:t>
             </a:fld>
             <a:endParaRPr lang="en-US"/>
           </a:p>
@@ -1386,7 +1377,7 @@
           <a:p>
             <a:fld id="{48F3298D-9386-084D-8BF7-B185F903367F}" type="datetimeFigureOut">
               <a:rPr lang="en-US" smtClean="0"/>
-              <a:t>11/29/22</a:t>
+              <a:t>4/15/26</a:t>
             </a:fld>
             <a:endParaRPr lang="en-US"/>
           </a:p>
@@ -1594,7 +1585,7 @@
           <a:p>
             <a:fld id="{48F3298D-9386-084D-8BF7-B185F903367F}" type="datetimeFigureOut">
               <a:rPr lang="en-US" smtClean="0"/>
-              <a:t>11/29/22</a:t>
+              <a:t>4/15/26</a:t>
             </a:fld>
             <a:endParaRPr lang="en-US"/>
           </a:p>
@@ -1802,7 +1793,7 @@
           <a:p>
             <a:fld id="{48F3298D-9386-084D-8BF7-B185F903367F}" type="datetimeFigureOut">
               <a:rPr lang="en-US" smtClean="0"/>
-              <a:t>11/29/22</a:t>
+              <a:t>4/15/26</a:t>
             </a:fld>
             <a:endParaRPr lang="en-US"/>
           </a:p>
@@ -2077,7 +2068,7 @@
           <a:p>
             <a:fld id="{48F3298D-9386-084D-8BF7-B185F903367F}" type="datetimeFigureOut">
               <a:rPr lang="en-US" smtClean="0"/>
-              <a:t>11/29/22</a:t>
+              <a:t>4/15/26</a:t>
             </a:fld>
             <a:endParaRPr lang="en-US"/>
           </a:p>
@@ -2342,7 +2333,7 @@
           <a:p>
             <a:fld id="{48F3298D-9386-084D-8BF7-B185F903367F}" type="datetimeFigureOut">
               <a:rPr lang="en-US" smtClean="0"/>
-              <a:t>11/29/22</a:t>
+              <a:t>4/15/26</a:t>
             </a:fld>
             <a:endParaRPr lang="en-US"/>
           </a:p>
@@ -2754,7 +2745,7 @@
           <a:p>
             <a:fld id="{48F3298D-9386-084D-8BF7-B185F903367F}" type="datetimeFigureOut">
               <a:rPr lang="en-US" smtClean="0"/>
-              <a:t>11/29/22</a:t>
+              <a:t>4/15/26</a:t>
             </a:fld>
             <a:endParaRPr lang="en-US"/>
           </a:p>
@@ -2895,7 +2886,7 @@
           <a:p>
             <a:fld id="{48F3298D-9386-084D-8BF7-B185F903367F}" type="datetimeFigureOut">
               <a:rPr lang="en-US" smtClean="0"/>
-              <a:t>11/29/22</a:t>
+              <a:t>4/15/26</a:t>
             </a:fld>
             <a:endParaRPr lang="en-US"/>
           </a:p>
@@ -3008,7 +2999,7 @@
           <a:p>
             <a:fld id="{48F3298D-9386-084D-8BF7-B185F903367F}" type="datetimeFigureOut">
               <a:rPr lang="en-US" smtClean="0"/>
-              <a:t>11/29/22</a:t>
+              <a:t>4/15/26</a:t>
             </a:fld>
             <a:endParaRPr lang="en-US"/>
           </a:p>
@@ -3319,7 +3310,7 @@
           <a:p>
             <a:fld id="{48F3298D-9386-084D-8BF7-B185F903367F}" type="datetimeFigureOut">
               <a:rPr lang="en-US" smtClean="0"/>
-              <a:t>11/29/22</a:t>
+              <a:t>4/15/26</a:t>
             </a:fld>
             <a:endParaRPr lang="en-US"/>
           </a:p>
@@ -3607,7 +3598,7 @@
           <a:p>
             <a:fld id="{48F3298D-9386-084D-8BF7-B185F903367F}" type="datetimeFigureOut">
               <a:rPr lang="en-US" smtClean="0"/>
-              <a:t>11/29/22</a:t>
+              <a:t>4/15/26</a:t>
             </a:fld>
             <a:endParaRPr lang="en-US"/>
           </a:p>
@@ -3848,7 +3839,7 @@
           <a:p>
             <a:fld id="{48F3298D-9386-084D-8BF7-B185F903367F}" type="datetimeFigureOut">
               <a:rPr lang="en-US" smtClean="0"/>
-              <a:t>11/29/22</a:t>
+              <a:t>4/15/26</a:t>
             </a:fld>
             <a:endParaRPr lang="en-US"/>
           </a:p>
@@ -12064,10 +12055,10 @@
           <p:nvPr/>
         </p:nvPicPr>
         <p:blipFill>
-          <a:blip r:embed="rId2">
+          <a:blip>
             <a:extLst>
               <a:ext uri="{96DAC541-7B7A-43D3-8B79-37D633B846F1}">
-                <asvg:svgBlip xmlns:asvg="http://schemas.microsoft.com/office/drawing/2016/SVG/main" r:embed="rId3"/>
+                <asvg:svgBlip xmlns:asvg="http://schemas.microsoft.com/office/drawing/2016/SVG/main" r:embed="rId2"/>
               </a:ext>
             </a:extLst>
           </a:blip>
@@ -12100,10 +12091,10 @@
           <p:nvPr/>
         </p:nvPicPr>
         <p:blipFill>
-          <a:blip r:embed="rId2">
+          <a:blip>
             <a:extLst>
               <a:ext uri="{96DAC541-7B7A-43D3-8B79-37D633B846F1}">
-                <asvg:svgBlip xmlns:asvg="http://schemas.microsoft.com/office/drawing/2016/SVG/main" r:embed="rId3"/>
+                <asvg:svgBlip xmlns:asvg="http://schemas.microsoft.com/office/drawing/2016/SVG/main" r:embed="rId2"/>
               </a:ext>
             </a:extLst>
           </a:blip>
@@ -12901,10 +12892,10 @@
           <p:nvPr/>
         </p:nvPicPr>
         <p:blipFill>
-          <a:blip r:embed="rId2">
+          <a:blip>
             <a:extLst>
               <a:ext uri="{96DAC541-7B7A-43D3-8B79-37D633B846F1}">
-                <asvg:svgBlip xmlns:asvg="http://schemas.microsoft.com/office/drawing/2016/SVG/main" r:embed="rId3"/>
+                <asvg:svgBlip xmlns:asvg="http://schemas.microsoft.com/office/drawing/2016/SVG/main" r:embed="rId2"/>
               </a:ext>
             </a:extLst>
           </a:blip>
@@ -12937,10 +12928,10 @@
           <p:nvPr/>
         </p:nvPicPr>
         <p:blipFill>
-          <a:blip r:embed="rId2">
+          <a:blip>
             <a:extLst>
               <a:ext uri="{96DAC541-7B7A-43D3-8B79-37D633B846F1}">
-                <asvg:svgBlip xmlns:asvg="http://schemas.microsoft.com/office/drawing/2016/SVG/main" r:embed="rId3"/>
+                <asvg:svgBlip xmlns:asvg="http://schemas.microsoft.com/office/drawing/2016/SVG/main" r:embed="rId2"/>
               </a:ext>
             </a:extLst>
           </a:blip>
@@ -19390,224 +19381,6 @@
     <p:extLst>
       <p:ext uri="{BB962C8B-B14F-4D97-AF65-F5344CB8AC3E}">
         <p14:creationId xmlns:p14="http://schemas.microsoft.com/office/powerpoint/2010/main" val="3266193636"/>
-      </p:ext>
-    </p:extLst>
-  </p:cSld>
-  <p:clrMapOvr>
-    <a:masterClrMapping/>
-  </p:clrMapOvr>
-</p:sld>
-</file>
-
-<file path=ppt/slides/slide34.xml><?xml version="1.0" encoding="utf-8"?>
-<p:sld xmlns:a="http://schemas.openxmlformats.org/drawingml/2006/main" xmlns:r="http://schemas.openxmlformats.org/officeDocument/2006/relationships" xmlns:p="http://schemas.openxmlformats.org/presentationml/2006/main">
-  <p:cSld>
-    <p:spTree>
-      <p:nvGrpSpPr>
-        <p:cNvPr id="1" name=""/>
-        <p:cNvGrpSpPr/>
-        <p:nvPr/>
-      </p:nvGrpSpPr>
-      <p:grpSpPr>
-        <a:xfrm>
-          <a:off x="0" y="0"/>
-          <a:ext cx="0" cy="0"/>
-          <a:chOff x="0" y="0"/>
-          <a:chExt cx="0" cy="0"/>
-        </a:xfrm>
-      </p:grpSpPr>
-      <p:sp>
-        <p:nvSpPr>
-          <p:cNvPr id="2" name="Title 1">
-            <a:extLst>
-              <a:ext uri="{FF2B5EF4-FFF2-40B4-BE49-F238E27FC236}">
-                <a16:creationId xmlns:a16="http://schemas.microsoft.com/office/drawing/2014/main" id="{0133EFEF-6ACA-4E80-B4D2-CBA57E5BD21E}"/>
-              </a:ext>
-            </a:extLst>
-          </p:cNvPr>
-          <p:cNvSpPr>
-            <a:spLocks noGrp="1"/>
-          </p:cNvSpPr>
-          <p:nvPr>
-            <p:ph type="title"/>
-          </p:nvPr>
-        </p:nvSpPr>
-        <p:spPr>
-          <a:xfrm>
-            <a:off x="838200" y="274975"/>
-            <a:ext cx="10515600" cy="1325563"/>
-          </a:xfrm>
-        </p:spPr>
-        <p:txBody>
-          <a:bodyPr/>
-          <a:lstStyle/>
-          <a:p>
-            <a:pPr algn="ctr"/>
-            <a:r>
-              <a:rPr lang="en-US"/>
-              <a:t>Happy Thanksgiving!</a:t>
-            </a:r>
-          </a:p>
-        </p:txBody>
-      </p:sp>
-      <p:pic>
-        <p:nvPicPr>
-          <p:cNvPr id="1028" name="Picture 4" descr="Thanksgiving Dinner Drawing At Getdrawings - Draw Cartoon Thanksgiving  Dinner, HD Png Download - kindpng">
-            <a:extLst>
-              <a:ext uri="{FF2B5EF4-FFF2-40B4-BE49-F238E27FC236}">
-                <a16:creationId xmlns:a16="http://schemas.microsoft.com/office/drawing/2014/main" id="{F092F45B-A719-4261-9C13-00CE61352CDB}"/>
-              </a:ext>
-            </a:extLst>
-          </p:cNvPr>
-          <p:cNvPicPr>
-            <a:picLocks noChangeAspect="1" noChangeArrowheads="1"/>
-          </p:cNvPicPr>
-          <p:nvPr/>
-        </p:nvPicPr>
-        <p:blipFill>
-          <a:blip r:embed="rId2">
-            <a:extLst>
-              <a:ext uri="{BEBA8EAE-BF5A-486C-A8C5-ECC9F3942E4B}">
-                <a14:imgProps xmlns:a14="http://schemas.microsoft.com/office/drawing/2010/main">
-                  <a14:imgLayer r:embed="rId3">
-                    <a14:imgEffect>
-                      <a14:backgroundRemoval t="9032" b="89677" l="7907" r="91047">
-                        <a14:foregroundMark x1="31744" y1="52000" x2="31744" y2="52000"/>
-                        <a14:foregroundMark x1="30349" y1="50968" x2="30349" y2="50968"/>
-                        <a14:foregroundMark x1="30233" y1="52387" x2="30233" y2="52387"/>
-                        <a14:foregroundMark x1="33256" y1="52000" x2="33256" y2="52000"/>
-                        <a14:foregroundMark x1="15698" y1="47484" x2="15698" y2="47484"/>
-                        <a14:foregroundMark x1="43023" y1="17419" x2="43023" y2="17419"/>
-                        <a14:foregroundMark x1="83256" y1="24129" x2="83256" y2="24129"/>
-                        <a14:foregroundMark x1="85349" y1="59613" x2="85349" y2="59613"/>
-                        <a14:foregroundMark x1="18140" y1="24903" x2="18140" y2="24903"/>
-                        <a14:foregroundMark x1="16628" y1="9290" x2="16628" y2="9290"/>
-                        <a14:foregroundMark x1="23837" y1="10323" x2="23837" y2="10323"/>
-                        <a14:foregroundMark x1="22674" y1="14968" x2="22674" y2="14968"/>
-                        <a14:foregroundMark x1="24070" y1="9677" x2="24070" y2="9677"/>
-                        <a14:foregroundMark x1="14070" y1="50452" x2="14070" y2="50452"/>
-                        <a14:foregroundMark x1="18953" y1="69806" x2="18953" y2="69806"/>
-                        <a14:foregroundMark x1="7907" y1="32000" x2="7907" y2="32000"/>
-                        <a14:foregroundMark x1="8721" y1="35871" x2="8721" y2="35871"/>
-                        <a14:foregroundMark x1="7907" y1="33935" x2="7907" y2="33935"/>
-                        <a14:foregroundMark x1="8721" y1="32258" x2="8721" y2="32258"/>
-                        <a14:foregroundMark x1="8721" y1="31742" x2="8721" y2="31742"/>
-                        <a14:foregroundMark x1="9070" y1="36129" x2="9070" y2="36129"/>
-                        <a14:foregroundMark x1="10000" y1="36903" x2="10000" y2="36903"/>
-                        <a14:foregroundMark x1="9186" y1="34323" x2="9186" y2="34323"/>
-                        <a14:foregroundMark x1="9186" y1="33419" x2="9186" y2="33419"/>
-                        <a14:foregroundMark x1="9302" y1="37161" x2="9302" y2="37161"/>
-                        <a14:foregroundMark x1="10000" y1="38323" x2="10000" y2="38323"/>
-                        <a14:foregroundMark x1="10000" y1="38581" x2="10000" y2="38581"/>
-                        <a14:foregroundMark x1="8372" y1="30323" x2="8372" y2="30323"/>
-                        <a14:foregroundMark x1="20930" y1="14968" x2="20930" y2="14968"/>
-                        <a14:foregroundMark x1="22907" y1="10839" x2="22907" y2="10839"/>
-                        <a14:foregroundMark x1="20000" y1="66968" x2="20000" y2="66968"/>
-                        <a14:foregroundMark x1="77907" y1="71871" x2="77907" y2="71871"/>
-                        <a14:foregroundMark x1="77907" y1="72129" x2="77907" y2="72129"/>
-                        <a14:foregroundMark x1="83488" y1="80387" x2="83488" y2="80387"/>
-                        <a14:foregroundMark x1="91047" y1="69935" x2="91047" y2="69935"/>
-                        <a14:foregroundMark x1="87442" y1="69290" x2="87442" y2="69290"/>
-                        <a14:foregroundMark x1="86512" y1="68129" x2="86512" y2="68129"/>
-                        <a14:foregroundMark x1="88256" y1="61935" x2="88256" y2="61935"/>
-                        <a14:foregroundMark x1="83023" y1="58452" x2="83023" y2="58452"/>
-                      </a14:backgroundRemoval>
-                    </a14:imgEffect>
-                    <a14:imgEffect>
-                      <a14:saturation sat="400000"/>
-                    </a14:imgEffect>
-                  </a14:imgLayer>
-                </a14:imgProps>
-              </a:ext>
-              <a:ext uri="{28A0092B-C50C-407E-A947-70E740481C1C}">
-                <a14:useLocalDpi xmlns:a14="http://schemas.microsoft.com/office/drawing/2010/main" val="0"/>
-              </a:ext>
-            </a:extLst>
-          </a:blip>
-          <a:srcRect/>
-          <a:stretch>
-            <a:fillRect/>
-          </a:stretch>
-        </p:blipFill>
-        <p:spPr bwMode="auto">
-          <a:xfrm>
-            <a:off x="1794652" y="1571017"/>
-            <a:ext cx="5321935" cy="4795736"/>
-          </a:xfrm>
-          <a:prstGeom prst="rect">
-            <a:avLst/>
-          </a:prstGeom>
-          <a:noFill/>
-          <a:extLst>
-            <a:ext uri="{909E8E84-426E-40DD-AFC4-6F175D3DCCD1}">
-              <a14:hiddenFill xmlns:a14="http://schemas.microsoft.com/office/drawing/2010/main">
-                <a:solidFill>
-                  <a:srgbClr val="FFFFFF"/>
-                </a:solidFill>
-              </a14:hiddenFill>
-            </a:ext>
-          </a:extLst>
-        </p:spPr>
-      </p:pic>
-      <p:sp>
-        <p:nvSpPr>
-          <p:cNvPr id="7" name="Title 1">
-            <a:extLst>
-              <a:ext uri="{FF2B5EF4-FFF2-40B4-BE49-F238E27FC236}">
-                <a16:creationId xmlns:a16="http://schemas.microsoft.com/office/drawing/2014/main" id="{0DA8296D-34F8-44E1-A169-AC53868798BD}"/>
-              </a:ext>
-            </a:extLst>
-          </p:cNvPr>
-          <p:cNvSpPr txBox="1">
-            <a:spLocks/>
-          </p:cNvSpPr>
-          <p:nvPr/>
-        </p:nvSpPr>
-        <p:spPr>
-          <a:xfrm>
-            <a:off x="747408" y="5522710"/>
-            <a:ext cx="10515600" cy="1325563"/>
-          </a:xfrm>
-          <a:prstGeom prst="rect">
-            <a:avLst/>
-          </a:prstGeom>
-        </p:spPr>
-        <p:txBody>
-          <a:bodyPr vert="horz" lIns="91440" tIns="45720" rIns="91440" bIns="45720" rtlCol="0" anchor="ctr">
-            <a:normAutofit/>
-          </a:bodyPr>
-          <a:lstStyle>
-            <a:lvl1pPr algn="l" defTabSz="914400" rtl="0" eaLnBrk="1" latinLnBrk="0" hangingPunct="1">
-              <a:lnSpc>
-                <a:spcPct val="90000"/>
-              </a:lnSpc>
-              <a:spcBef>
-                <a:spcPct val="0"/>
-              </a:spcBef>
-              <a:buNone/>
-              <a:defRPr sz="4400" b="0" i="0" kern="1200">
-                <a:solidFill>
-                  <a:srgbClr val="002060"/>
-                </a:solidFill>
-                <a:latin typeface="Calibri" panose="020F0502020204030204" pitchFamily="34" charset="0"/>
-                <a:ea typeface="+mj-ea"/>
-                <a:cs typeface="Calibri" panose="020F0502020204030204" pitchFamily="34" charset="0"/>
-              </a:defRPr>
-            </a:lvl1pPr>
-          </a:lstStyle>
-          <a:p>
-            <a:pPr algn="ctr"/>
-            <a:r>
-              <a:rPr lang="en-US"/>
-              <a:t>Stay safe!</a:t>
-            </a:r>
-          </a:p>
-        </p:txBody>
-      </p:sp>
-    </p:spTree>
-    <p:extLst>
-      <p:ext uri="{BB962C8B-B14F-4D97-AF65-F5344CB8AC3E}">
-        <p14:creationId xmlns:p14="http://schemas.microsoft.com/office/powerpoint/2010/main" val="2126052325"/>
       </p:ext>
     </p:extLst>
   </p:cSld>
